--- a/data/documents/pptx/test_coverage_review.pptx
+++ b/data/documents/pptx/test_coverage_review.pptx
@@ -647,7 +647,7 @@
           <a:lstStyle/>
           <a:p>
             <a:r>
-              <a:t>Shaving test time from 3.82s to 3.14s saves FastChip over $180,000 annually in backend tester time and guarantees Penang test floor capacity.</a:t>
+              <a:t>Shaving test time from 3.82s to 3.14s saves FastChip over 180,000 annually in backend tester time and guarantees Penang test floor capacity.</a:t>
             </a:r>
           </a:p>
         </p:txBody>
@@ -3865,7 +3865,7 @@
             </a:r>
             <a:r>
               <a:rPr sz="1800" b="0" i="0"/>
-              <a:t> April 26, 2024</a:t>
+              <a:t> April 24, 2026</a:t>
             </a:r>
           </a:p>
         </p:txBody>
@@ -4253,7 +4253,7 @@
             <a:pPr lvl="1"/>
             <a:r>
               <a:rPr sz="1800" b="0" i="0"/>
-              <a:t>First Program Prototype (Jan 22): </a:t>
+              <a:t>First Program Prototype (Jan 19): </a:t>
             </a:r>
             <a:r>
               <a:rPr sz="1800" b="1" i="0"/>
@@ -4268,7 +4268,7 @@
             <a:pPr lvl="1"/>
             <a:r>
               <a:rPr sz="1800" b="0" i="0"/>
-              <a:t>Rev 1.0 Release (Feb 26): </a:t>
+              <a:t>Rev 1.0 Release (Feb 23): </a:t>
             </a:r>
             <a:r>
               <a:rPr sz="1800" b="1" i="0"/>
@@ -4283,7 +4283,7 @@
             <a:pPr lvl="1"/>
             <a:r>
               <a:rPr sz="1800" b="0" i="0"/>
-              <a:t>Rev 1.2 Final Production (Apr 21): </a:t>
+              <a:t>Rev 1.2 Final Production (Apr 19): </a:t>
             </a:r>
             <a:r>
               <a:rPr sz="1800" b="1" i="0"/>
@@ -4596,7 +4596,7 @@
             </a:r>
             <a:r>
               <a:rPr sz="2000" b="0" i="0"/>
-              <a:t> Limits tightened by $6\sigma$ based on 50,000-unit CPK characterization distributions.</a:t>
+              <a:t> Limits tightened by 6σ based on 50,000-unit CPK characterization distributions.</a:t>
             </a:r>
           </a:p>
           <a:p>
